--- a/output/auto-generated-ppt.pptx
+++ b/output/auto-generated-ppt.pptx
@@ -3227,7 +3227,7 @@
               </a:defRPr>
             </a:pPr>
             <a:r>
-              <a:t>ABCD</a:t>
+              <a:t>My IDEA</a:t>
             </a:r>
           </a:p>
         </p:txBody>
